--- a/presentation/Twins CATE Presentation.pptx
+++ b/presentation/Twins CATE Presentation.pptx
@@ -20,6 +20,7 @@
     <p:sldId id="268" r:id="rId19"/>
     <p:sldId id="269" r:id="rId20"/>
     <p:sldId id="270" r:id="rId21"/>
+    <p:sldId id="271" r:id="rId22"/>
   </p:sldIdLst>
   <p:sldSz cx="12191695" cy="6858000" type="screen4x3"/>
   <p:notesSz cx="6858000" cy="9144000"/>
@@ -6043,6 +6044,270 @@
               </a:defRPr>
             </a:pPr>
             <a:r>
+              <a:t>Limitations &amp; Future Work</a:t>
+            </a:r>
+          </a:p>
+        </p:txBody>
+      </p:sp>
+      <p:sp>
+        <p:nvSpPr>
+          <p:cNvPr id="3" name="TextBox 2"/>
+          <p:cNvSpPr txBox="1"/>
+          <p:nvPr/>
+        </p:nvSpPr>
+        <p:spPr>
+          <a:xfrm>
+            <a:off x="457200" y="1005840"/>
+            <a:ext cx="11247120" cy="5486400"/>
+          </a:xfrm>
+          <a:prstGeom prst="rect">
+            <a:avLst/>
+          </a:prstGeom>
+          <a:noFill/>
+        </p:spPr>
+        <p:txBody>
+          <a:bodyPr wrap="square">
+            <a:spAutoFit/>
+          </a:bodyPr>
+          <a:lstStyle/>
+          <a:p>
+            <a:pPr>
+              <a:lnSpc>
+                <a:spcPct val="135000"/>
+              </a:lnSpc>
+              <a:defRPr sz="1600">
+                <a:solidFill>
+                  <a:srgbClr val="1F2C44"/>
+                </a:solidFill>
+              </a:defRPr>
+            </a:pPr>
+            <a:r>
+              <a:t>•  Limitations:</a:t>
+            </a:r>
+          </a:p>
+          <a:p>
+            <a:pPr>
+              <a:lnSpc>
+                <a:spcPct val="135000"/>
+              </a:lnSpc>
+              <a:defRPr sz="1400">
+                <a:solidFill>
+                  <a:srgbClr val="555555"/>
+                </a:solidFill>
+              </a:defRPr>
+            </a:pPr>
+            <a:r>
+              <a:t>      –  Simulated confounding — bias my methods correct depends on my assignment rule</a:t>
+            </a:r>
+          </a:p>
+          <a:p>
+            <a:pPr>
+              <a:lnSpc>
+                <a:spcPct val="135000"/>
+              </a:lnSpc>
+              <a:defRPr sz="1400">
+                <a:solidFill>
+                  <a:srgbClr val="555555"/>
+                </a:solidFill>
+              </a:defRPr>
+            </a:pPr>
+            <a:r>
+              <a:t>      –  Unobserved pair-level factors (placental position) not in X — sensitivity grid quantifies but can't remove</a:t>
+            </a:r>
+          </a:p>
+          <a:p>
+            <a:pPr>
+              <a:lnSpc>
+                <a:spcPct val="135000"/>
+              </a:lnSpc>
+              <a:defRPr sz="1400">
+                <a:solidFill>
+                  <a:srgbClr val="555555"/>
+                </a:solidFill>
+              </a:defRPr>
+            </a:pPr>
+            <a:r>
+              <a:t>      –  Rare outcome (P(Y=1) = 0.18) limits heterogeneity signal — drives DR over-dispersion</a:t>
+            </a:r>
+          </a:p>
+          <a:p>
+            <a:pPr>
+              <a:lnSpc>
+                <a:spcPct val="135000"/>
+              </a:lnSpc>
+              <a:defRPr sz="1400">
+                <a:solidFill>
+                  <a:srgbClr val="555555"/>
+                </a:solidFill>
+              </a:defRPr>
+            </a:pPr>
+            <a:r>
+              <a:t>      –  Generalizability — results apply only to same-sex twin pairs where both infants weigh under 2 kg</a:t>
+            </a:r>
+          </a:p>
+          <a:p>
+            <a:pPr>
+              <a:lnSpc>
+                <a:spcPct val="135000"/>
+              </a:lnSpc>
+              <a:defRPr sz="1400">
+                <a:solidFill>
+                  <a:srgbClr val="555555"/>
+                </a:solidFill>
+              </a:defRPr>
+            </a:pPr>
+            <a:r>
+              <a:t>      –  Treatment is a within-pair contrast, not a free-standing policy intervention</a:t>
+            </a:r>
+          </a:p>
+        </p:txBody>
+      </p:sp>
+      <p:sp>
+        <p:nvSpPr>
+          <p:cNvPr id="4" name="TextBox 3"/>
+          <p:cNvSpPr txBox="1"/>
+          <p:nvPr/>
+        </p:nvSpPr>
+        <p:spPr>
+          <a:xfrm>
+            <a:off x="457200" y="4114800"/>
+            <a:ext cx="11247120" cy="5486400"/>
+          </a:xfrm>
+          <a:prstGeom prst="rect">
+            <a:avLst/>
+          </a:prstGeom>
+          <a:noFill/>
+        </p:spPr>
+        <p:txBody>
+          <a:bodyPr wrap="square">
+            <a:spAutoFit/>
+          </a:bodyPr>
+          <a:lstStyle/>
+          <a:p>
+            <a:pPr>
+              <a:lnSpc>
+                <a:spcPct val="135000"/>
+              </a:lnSpc>
+              <a:defRPr sz="1600">
+                <a:solidFill>
+                  <a:srgbClr val="1F2C44"/>
+                </a:solidFill>
+              </a:defRPr>
+            </a:pPr>
+            <a:r>
+              <a:t>•  Future work:</a:t>
+            </a:r>
+          </a:p>
+          <a:p>
+            <a:pPr>
+              <a:lnSpc>
+                <a:spcPct val="135000"/>
+              </a:lnSpc>
+              <a:defRPr sz="1400">
+                <a:solidFill>
+                  <a:srgbClr val="555555"/>
+                </a:solidFill>
+              </a:defRPr>
+            </a:pPr>
+            <a:r>
+              <a:t>      –  CV-tune CATE hyperparameters using held-out R-loss / DR-score MSE</a:t>
+            </a:r>
+          </a:p>
+          <a:p>
+            <a:pPr>
+              <a:lnSpc>
+                <a:spcPct val="135000"/>
+              </a:lnSpc>
+              <a:defRPr sz="1400">
+                <a:solidFill>
+                  <a:srgbClr val="555555"/>
+                </a:solidFill>
+              </a:defRPr>
+            </a:pPr>
+            <a:r>
+              <a:t>      –  Investigate the AIPW-vs-truth subgroup divergence — trim/stabilize subgroup propensities, compare against TMLE</a:t>
+            </a:r>
+          </a:p>
+          <a:p>
+            <a:pPr>
+              <a:lnSpc>
+                <a:spcPct val="135000"/>
+              </a:lnSpc>
+              <a:defRPr sz="1400">
+                <a:solidFill>
+                  <a:srgbClr val="555555"/>
+                </a:solidFill>
+              </a:defRPr>
+            </a:pPr>
+            <a:r>
+              <a:t>      –  Replicate on the real (non-simulated) assignment with a within-pair fixed-effects design</a:t>
+            </a:r>
+          </a:p>
+          <a:p>
+            <a:pPr>
+              <a:lnSpc>
+                <a:spcPct val="135000"/>
+              </a:lnSpc>
+              <a:defRPr sz="1400">
+                <a:solidFill>
+                  <a:srgbClr val="555555"/>
+                </a:solidFill>
+              </a:defRPr>
+            </a:pPr>
+            <a:r>
+              <a:t>      –  Policy learning — fit a policy tree on CATE outputs once subgroup stability is better understood</a:t>
+            </a:r>
+          </a:p>
+        </p:txBody>
+      </p:sp>
+    </p:spTree>
+  </p:cSld>
+  <p:clrMapOvr>
+    <a:masterClrMapping/>
+  </p:clrMapOvr>
+</p:sld>
+</file>
+
+<file path=ppt/slides/slide16.xml><?xml version="1.0" encoding="utf-8"?>
+<p:sld xmlns:a="http://schemas.openxmlformats.org/drawingml/2006/main" xmlns:p="http://schemas.openxmlformats.org/presentationml/2006/main" xmlns:r="http://schemas.openxmlformats.org/officeDocument/2006/relationships">
+  <p:cSld>
+    <p:spTree>
+      <p:nvGrpSpPr>
+        <p:cNvPr id="1" name=""/>
+        <p:cNvGrpSpPr/>
+        <p:nvPr/>
+      </p:nvGrpSpPr>
+      <p:grpSpPr/>
+      <p:sp>
+        <p:nvSpPr>
+          <p:cNvPr id="2" name="TextBox 1"/>
+          <p:cNvSpPr txBox="1"/>
+          <p:nvPr/>
+        </p:nvSpPr>
+        <p:spPr>
+          <a:xfrm>
+            <a:off x="457200" y="274320"/>
+            <a:ext cx="11247120" cy="731520"/>
+          </a:xfrm>
+          <a:prstGeom prst="rect">
+            <a:avLst/>
+          </a:prstGeom>
+          <a:noFill/>
+        </p:spPr>
+        <p:txBody>
+          <a:bodyPr wrap="square">
+            <a:spAutoFit/>
+          </a:bodyPr>
+          <a:lstStyle/>
+          <a:p>
+            <a:pPr>
+              <a:defRPr sz="3000" b="1">
+                <a:solidFill>
+                  <a:srgbClr val="1F2C44"/>
+                </a:solidFill>
+              </a:defRPr>
+            </a:pPr>
+            <a:r>
               <a:t>Takeaways</a:t>
             </a:r>
           </a:p>
@@ -6369,7 +6634,7 @@
               <a:lnSpc>
                 <a:spcPct val="135000"/>
               </a:lnSpc>
-              <a:defRPr sz="2000">
+              <a:defRPr sz="1800">
                 <a:solidFill>
                   <a:srgbClr val="1F2C44"/>
                 </a:solidFill>
@@ -6384,7 +6649,7 @@
               <a:lnSpc>
                 <a:spcPct val="135000"/>
               </a:lnSpc>
-              <a:defRPr sz="2000">
+              <a:defRPr sz="1800">
                 <a:solidFill>
                   <a:srgbClr val="1F2C44"/>
                 </a:solidFill>
@@ -6399,14 +6664,89 @@
               <a:lnSpc>
                 <a:spcPct val="135000"/>
               </a:lnSpc>
+              <a:defRPr sz="1600">
+                <a:solidFill>
+                  <a:srgbClr val="555555"/>
+                </a:solidFill>
+              </a:defRPr>
+            </a:pPr>
+            <a:r>
+              <a:t>      –  Maternal conditions (diabetes, hypertension, smoking) drive both</a:t>
+            </a:r>
+          </a:p>
+          <a:p>
+            <a:pPr>
+              <a:lnSpc>
+                <a:spcPct val="135000"/>
+              </a:lnSpc>
+              <a:defRPr sz="1600">
+                <a:solidFill>
+                  <a:srgbClr val="555555"/>
+                </a:solidFill>
+              </a:defRPr>
+            </a:pPr>
+            <a:r>
+              <a:t>      –  → the observed association could be mostly confounding</a:t>
+            </a:r>
+          </a:p>
+          <a:p>
+            <a:pPr>
+              <a:lnSpc>
+                <a:spcPct val="135000"/>
+              </a:lnSpc>
               <a:defRPr sz="1800">
                 <a:solidFill>
+                  <a:srgbClr val="1F2C44"/>
+                </a:solidFill>
+              </a:defRPr>
+            </a:pPr>
+            <a:r>
+              <a:t>•  </a:t>
+            </a:r>
+          </a:p>
+          <a:p>
+            <a:pPr>
+              <a:lnSpc>
+                <a:spcPct val="135000"/>
+              </a:lnSpc>
+              <a:defRPr sz="1800">
+                <a:solidFill>
+                  <a:srgbClr val="1F2C44"/>
+                </a:solidFill>
+              </a:defRPr>
+            </a:pPr>
+            <a:r>
+              <a:t>•  Why it matters for policy:</a:t>
+            </a:r>
+          </a:p>
+          <a:p>
+            <a:pPr>
+              <a:lnSpc>
+                <a:spcPct val="135000"/>
+              </a:lnSpc>
+              <a:defRPr sz="1600">
+                <a:solidFill>
                   <a:srgbClr val="555555"/>
                 </a:solidFill>
               </a:defRPr>
             </a:pPr>
             <a:r>
-              <a:t>      –  Maternal conditions (diabetes, hypertension, smoking) drive both</a:t>
+              <a:t>      –  If causal → improving fetal growth could reduce mortality</a:t>
+            </a:r>
+          </a:p>
+          <a:p>
+            <a:pPr>
+              <a:lnSpc>
+                <a:spcPct val="135000"/>
+              </a:lnSpc>
+              <a:defRPr sz="1600">
+                <a:solidFill>
+                  <a:srgbClr val="555555"/>
+                </a:solidFill>
+              </a:defRPr>
+            </a:pPr>
+            <a:r>
+              <a:t>      –  If confounded → resources better spent on maternal conditions</a:t>
             </a:r>
           </a:p>
           <a:p>
@@ -6416,21 +6756,6 @@
               </a:lnSpc>
               <a:defRPr sz="1800">
                 <a:solidFill>
-                  <a:srgbClr val="555555"/>
-                </a:solidFill>
-              </a:defRPr>
-            </a:pPr>
-            <a:r>
-              <a:t>      –  → the observed association could be mostly confounding</a:t>
-            </a:r>
-          </a:p>
-          <a:p>
-            <a:pPr>
-              <a:lnSpc>
-                <a:spcPct val="135000"/>
-              </a:lnSpc>
-              <a:defRPr sz="2000">
-                <a:solidFill>
                   <a:srgbClr val="1F2C44"/>
                 </a:solidFill>
               </a:defRPr>
@@ -6444,14 +6769,29 @@
               <a:lnSpc>
                 <a:spcPct val="135000"/>
               </a:lnSpc>
-              <a:defRPr sz="2000">
+              <a:defRPr sz="1800" b="1">
+                <a:solidFill>
+                  <a:srgbClr val="C0392B"/>
+                </a:solidFill>
+              </a:defRPr>
+            </a:pPr>
+            <a:r>
+              <a:t>•  My question: what's the causal effect of being the heavier twin on one-year mortality?</a:t>
+            </a:r>
+          </a:p>
+          <a:p>
+            <a:pPr>
+              <a:lnSpc>
+                <a:spcPct val="135000"/>
+              </a:lnSpc>
+              <a:defRPr sz="1800">
                 <a:solidFill>
                   <a:srgbClr val="1F2C44"/>
                 </a:solidFill>
               </a:defRPr>
             </a:pPr>
             <a:r>
-              <a:t>•  Why it matters for policy:</a:t>
+              <a:t>•  </a:t>
             </a:r>
           </a:p>
           <a:p>
@@ -6461,57 +6801,12 @@
               </a:lnSpc>
               <a:defRPr sz="1800">
                 <a:solidFill>
-                  <a:srgbClr val="555555"/>
-                </a:solidFill>
-              </a:defRPr>
-            </a:pPr>
-            <a:r>
-              <a:t>      –  If causal → improving fetal growth could reduce mortality</a:t>
-            </a:r>
-          </a:p>
-          <a:p>
-            <a:pPr>
-              <a:lnSpc>
-                <a:spcPct val="135000"/>
-              </a:lnSpc>
-              <a:defRPr sz="1800">
-                <a:solidFill>
-                  <a:srgbClr val="555555"/>
-                </a:solidFill>
-              </a:defRPr>
-            </a:pPr>
-            <a:r>
-              <a:t>      –  If confounded → resources better spent on maternal conditions</a:t>
-            </a:r>
-          </a:p>
-          <a:p>
-            <a:pPr>
-              <a:lnSpc>
-                <a:spcPct val="135000"/>
-              </a:lnSpc>
-              <a:defRPr sz="2000">
-                <a:solidFill>
                   <a:srgbClr val="1F2C44"/>
                 </a:solidFill>
               </a:defRPr>
             </a:pPr>
             <a:r>
-              <a:t>•  </a:t>
-            </a:r>
-          </a:p>
-          <a:p>
-            <a:pPr>
-              <a:lnSpc>
-                <a:spcPct val="135000"/>
-              </a:lnSpc>
-              <a:defRPr sz="2000" b="1">
-                <a:solidFill>
-                  <a:srgbClr val="C0392B"/>
-                </a:solidFill>
-              </a:defRPr>
-            </a:pPr>
-            <a:r>
-              <a:t>•  My question: what's the causal effect of being the heavier twin on one-year mortality?</a:t>
+              <a:t>•  Roadmap: data &amp; setup → identification &amp; methods → ATE &amp; CATE results → evaluation → limitations &amp; takeaways</a:t>
             </a:r>
           </a:p>
         </p:txBody>
@@ -7278,40 +7573,16 @@
           </a:p>
         </p:txBody>
       </p:sp>
-      <p:pic>
-        <p:nvPicPr>
-          <p:cNvPr id="3" name="Picture 2" descr="02_dag.png"/>
-          <p:cNvPicPr>
-            <a:picLocks noChangeAspect="1"/>
-          </p:cNvPicPr>
+      <p:sp>
+        <p:nvSpPr>
+          <p:cNvPr id="3" name="TextBox 2"/>
+          <p:cNvSpPr txBox="1"/>
           <p:nvPr/>
-        </p:nvPicPr>
-        <p:blipFill>
-          <a:blip r:embed="rId2"/>
-          <a:stretch>
-            <a:fillRect/>
-          </a:stretch>
-        </p:blipFill>
+        </p:nvSpPr>
         <p:spPr>
           <a:xfrm>
-            <a:off x="274320" y="1188720"/>
-            <a:ext cx="12182833" cy="3657600"/>
-          </a:xfrm>
-          <a:prstGeom prst="rect">
-            <a:avLst/>
-          </a:prstGeom>
-        </p:spPr>
-      </p:pic>
-      <p:sp>
-        <p:nvSpPr>
-          <p:cNvPr id="4" name="TextBox 3"/>
-          <p:cNvSpPr txBox="1"/>
-          <p:nvPr/>
-        </p:nvSpPr>
-        <p:spPr>
-          <a:xfrm>
-            <a:off x="5943600" y="1188720"/>
-            <a:ext cx="5943600" cy="5486400"/>
+            <a:off x="457200" y="960120"/>
+            <a:ext cx="11247120" cy="5486400"/>
           </a:xfrm>
           <a:prstGeom prst="rect">
             <a:avLst/>
@@ -7328,37 +7599,105 @@
               <a:lnSpc>
                 <a:spcPct val="135000"/>
               </a:lnSpc>
-              <a:defRPr sz="1600">
+              <a:defRPr sz="1700">
                 <a:solidFill>
                   <a:srgbClr val="1F2C44"/>
                 </a:solidFill>
               </a:defRPr>
             </a:pPr>
             <a:r>
-              <a:t>•  Conditional ignorability:  Y(0), Y(1) ⊥ T | X</a:t>
-            </a:r>
-          </a:p>
-          <a:p>
-            <a:pPr>
-              <a:lnSpc>
-                <a:spcPct val="135000"/>
-              </a:lnSpc>
-              <a:defRPr sz="1400">
+              <a:t>•  Causal inference rests on assumptions you can't verify from the data alone.</a:t>
+            </a:r>
+          </a:p>
+          <a:p>
+            <a:pPr>
+              <a:lnSpc>
+                <a:spcPct val="135000"/>
+              </a:lnSpc>
+              <a:defRPr sz="1700">
+                <a:solidFill>
+                  <a:srgbClr val="1F2C44"/>
+                </a:solidFill>
+              </a:defRPr>
+            </a:pPr>
+            <a:r>
+              <a:t>•  I rely on four standard ones:</a:t>
+            </a:r>
+          </a:p>
+        </p:txBody>
+      </p:sp>
+      <p:sp>
+        <p:nvSpPr>
+          <p:cNvPr id="4" name="TextBox 3"/>
+          <p:cNvSpPr txBox="1"/>
+          <p:nvPr/>
+        </p:nvSpPr>
+        <p:spPr>
+          <a:xfrm>
+            <a:off x="457200" y="1874519"/>
+            <a:ext cx="11247120" cy="5486400"/>
+          </a:xfrm>
+          <a:prstGeom prst="rect">
+            <a:avLst/>
+          </a:prstGeom>
+          <a:noFill/>
+        </p:spPr>
+        <p:txBody>
+          <a:bodyPr wrap="square">
+            <a:spAutoFit/>
+          </a:bodyPr>
+          <a:lstStyle/>
+          <a:p>
+            <a:pPr>
+              <a:lnSpc>
+                <a:spcPct val="135000"/>
+              </a:lnSpc>
+              <a:defRPr sz="1500">
+                <a:solidFill>
+                  <a:srgbClr val="1F2C44"/>
+                </a:solidFill>
+              </a:defRPr>
+            </a:pPr>
+            <a:r>
+              <a:t>•  Conditional ignorability:  once I condition on X, treatment is as-if-random</a:t>
+            </a:r>
+          </a:p>
+          <a:p>
+            <a:pPr>
+              <a:lnSpc>
+                <a:spcPct val="135000"/>
+              </a:lnSpc>
+              <a:defRPr sz="1300">
                 <a:solidFill>
                   <a:srgbClr val="555555"/>
                 </a:solidFill>
               </a:defRPr>
             </a:pPr>
             <a:r>
-              <a:t>      –  Holds by construction in the simulation</a:t>
-            </a:r>
-          </a:p>
-          <a:p>
-            <a:pPr>
-              <a:lnSpc>
-                <a:spcPct val="135000"/>
-              </a:lnSpc>
-              <a:defRPr sz="1600">
+              <a:t>      –  Y(0), Y(1) ⊥ T | X</a:t>
+            </a:r>
+          </a:p>
+          <a:p>
+            <a:pPr>
+              <a:lnSpc>
+                <a:spcPct val="135000"/>
+              </a:lnSpc>
+              <a:defRPr sz="1300">
+                <a:solidFill>
+                  <a:srgbClr val="555555"/>
+                </a:solidFill>
+              </a:defRPr>
+            </a:pPr>
+            <a:r>
+              <a:t>      –  Holds by construction here — treatment was generated from X</a:t>
+            </a:r>
+          </a:p>
+          <a:p>
+            <a:pPr>
+              <a:lnSpc>
+                <a:spcPct val="135000"/>
+              </a:lnSpc>
+              <a:defRPr sz="1500">
                 <a:solidFill>
                   <a:srgbClr val="1F2C44"/>
                 </a:solidFill>
@@ -7373,37 +7712,52 @@
               <a:lnSpc>
                 <a:spcPct val="135000"/>
               </a:lnSpc>
-              <a:defRPr sz="1600">
+              <a:defRPr sz="1500">
                 <a:solidFill>
                   <a:srgbClr val="1F2C44"/>
                 </a:solidFill>
               </a:defRPr>
             </a:pPr>
             <a:r>
-              <a:t>•  Positivity:  0 &lt; P(T=1 | X) &lt; 1</a:t>
-            </a:r>
-          </a:p>
-          <a:p>
-            <a:pPr>
-              <a:lnSpc>
-                <a:spcPct val="135000"/>
-              </a:lnSpc>
-              <a:defRPr sz="1400">
+              <a:t>•  Positivity:  every covariate combination has a nonzero chance of either treatment</a:t>
+            </a:r>
+          </a:p>
+          <a:p>
+            <a:pPr>
+              <a:lnSpc>
+                <a:spcPct val="135000"/>
+              </a:lnSpc>
+              <a:defRPr sz="1300">
                 <a:solidFill>
                   <a:srgbClr val="555555"/>
                 </a:solidFill>
               </a:defRPr>
             </a:pPr>
             <a:r>
-              <a:t>      –  Verified by overlap plot</a:t>
-            </a:r>
-          </a:p>
-          <a:p>
-            <a:pPr>
-              <a:lnSpc>
-                <a:spcPct val="135000"/>
-              </a:lnSpc>
-              <a:defRPr sz="1600">
+              <a:t>      –  0 &lt; P(T=1 | X) &lt; 1</a:t>
+            </a:r>
+          </a:p>
+          <a:p>
+            <a:pPr>
+              <a:lnSpc>
+                <a:spcPct val="135000"/>
+              </a:lnSpc>
+              <a:defRPr sz="1300">
+                <a:solidFill>
+                  <a:srgbClr val="555555"/>
+                </a:solidFill>
+              </a:defRPr>
+            </a:pPr>
+            <a:r>
+              <a:t>      –  Verified by the overlap plot in §2</a:t>
+            </a:r>
+          </a:p>
+          <a:p>
+            <a:pPr>
+              <a:lnSpc>
+                <a:spcPct val="135000"/>
+              </a:lnSpc>
+              <a:defRPr sz="1500">
                 <a:solidFill>
                   <a:srgbClr val="1F2C44"/>
                 </a:solidFill>
@@ -7418,22 +7772,37 @@
               <a:lnSpc>
                 <a:spcPct val="135000"/>
               </a:lnSpc>
-              <a:defRPr sz="1600">
+              <a:defRPr sz="1500">
                 <a:solidFill>
                   <a:srgbClr val="1F2C44"/>
                 </a:solidFill>
               </a:defRPr>
             </a:pPr>
             <a:r>
-              <a:t>•  Consistency:  Y = T·Y(1) + (1−T)·Y(0)</a:t>
-            </a:r>
-          </a:p>
-          <a:p>
-            <a:pPr>
-              <a:lnSpc>
-                <a:spcPct val="135000"/>
-              </a:lnSpc>
-              <a:defRPr sz="1600">
+              <a:t>•  Consistency:  the observed outcome equals the potential outcome under the assigned T</a:t>
+            </a:r>
+          </a:p>
+          <a:p>
+            <a:pPr>
+              <a:lnSpc>
+                <a:spcPct val="135000"/>
+              </a:lnSpc>
+              <a:defRPr sz="1300">
+                <a:solidFill>
+                  <a:srgbClr val="555555"/>
+                </a:solidFill>
+              </a:defRPr>
+            </a:pPr>
+            <a:r>
+              <a:t>      –  Y = T·Y(1) + (1−T)·Y(0)</a:t>
+            </a:r>
+          </a:p>
+          <a:p>
+            <a:pPr>
+              <a:lnSpc>
+                <a:spcPct val="135000"/>
+              </a:lnSpc>
+              <a:defRPr sz="1500">
                 <a:solidFill>
                   <a:srgbClr val="1F2C44"/>
                 </a:solidFill>
@@ -7448,14 +7817,29 @@
               <a:lnSpc>
                 <a:spcPct val="135000"/>
               </a:lnSpc>
-              <a:defRPr sz="1600">
+              <a:defRPr sz="1500">
                 <a:solidFill>
                   <a:srgbClr val="1F2C44"/>
                 </a:solidFill>
               </a:defRPr>
             </a:pPr>
             <a:r>
-              <a:t>•  SUTVA (pair-level):  within-pair contrast, not single-infant intervention</a:t>
+              <a:t>•  SUTVA (pair-level):  treatment is a within-pair contrast — heavier vs. lighter</a:t>
+            </a:r>
+          </a:p>
+          <a:p>
+            <a:pPr>
+              <a:lnSpc>
+                <a:spcPct val="135000"/>
+              </a:lnSpc>
+              <a:defRPr sz="1300">
+                <a:solidFill>
+                  <a:srgbClr val="555555"/>
+                </a:solidFill>
+              </a:defRPr>
+            </a:pPr>
+            <a:r>
+              <a:t>      –  Estimand is a pair-level comparison, not a single-infant intervention</a:t>
             </a:r>
           </a:p>
         </p:txBody>
